--- a/第二阶段项目路演_第四组.pptx
+++ b/第二阶段项目路演_第四组.pptx
@@ -4519,7 +4519,7 @@
         </p:nvSpPr>
         <p:spPr>
           <a:xfrm>
-            <a:off x="1257300" y="4762500"/>
+            <a:off x="1257300" y="4791075"/>
             <a:ext cx="6648450" cy="381000"/>
           </a:xfrm>
           <a:prstGeom prst="rect">
@@ -4547,7 +4547,7 @@
               </a:defRPr>
             </a:pPr>
             <a:r>
-              <a:rPr sz="1875" b="1">
+              <a:rPr lang="zh-CN" altLang="en-US" sz="1875" b="1" dirty="0">
                 <a:solidFill>
                   <a:srgbClr val="172033"/>
                 </a:solidFill>
@@ -4555,8 +4555,16 @@
                 <a:ea typeface="Microsoft YaHei"/>
                 <a:cs typeface="Microsoft YaHei"/>
               </a:rPr>
-              <a:t>完成联调与测试</a:t>
-            </a:r>
+              <a:t>机器学习智能预测</a:t>
+            </a:r>
+            <a:endParaRPr sz="1875" b="1" dirty="0">
+              <a:solidFill>
+                <a:srgbClr val="172033"/>
+              </a:solidFill>
+              <a:latin typeface="Microsoft YaHei"/>
+              <a:ea typeface="Microsoft YaHei"/>
+              <a:cs typeface="Microsoft YaHei"/>
+            </a:endParaRPr>
           </a:p>
         </p:txBody>
       </p:sp>
@@ -4604,16 +4612,24 @@
               </a:defRPr>
             </a:pPr>
             <a:r>
-              <a:rPr sz="1425" b="0">
-                <a:solidFill>
-                  <a:srgbClr val="667085"/>
-                </a:solidFill>
-                <a:latin typeface="Microsoft YaHei"/>
-                <a:ea typeface="Microsoft YaHei"/>
-                <a:cs typeface="Microsoft YaHei"/>
-              </a:rPr>
-              <a:t>规范校验、接口冒烟与异常数据验证</a:t>
-            </a:r>
+              <a:rPr lang="zh-CN" altLang="en-US" sz="1425" dirty="0">
+                <a:solidFill>
+                  <a:srgbClr val="667085"/>
+                </a:solidFill>
+                <a:latin typeface="Microsoft YaHei"/>
+                <a:ea typeface="Microsoft YaHei"/>
+                <a:cs typeface="Microsoft YaHei"/>
+              </a:rPr>
+              <a:t>利用机器学习智能预测数据趋势</a:t>
+            </a:r>
+            <a:endParaRPr sz="1425" b="0" dirty="0">
+              <a:solidFill>
+                <a:srgbClr val="667085"/>
+              </a:solidFill>
+              <a:latin typeface="Microsoft YaHei"/>
+              <a:ea typeface="Microsoft YaHei"/>
+              <a:cs typeface="Microsoft YaHei"/>
+            </a:endParaRPr>
           </a:p>
         </p:txBody>
       </p:sp>

--- a/第二阶段项目路演_第四组.pptx
+++ b/第二阶段项目路演_第四组.pptx
@@ -5314,7 +5314,7 @@
               </a:defRPr>
             </a:pPr>
             <a:r>
-              <a:rPr sz="1725" b="1">
+              <a:rPr sz="1725" b="1" dirty="0">
                 <a:solidFill>
                   <a:srgbClr val="172033"/>
                 </a:solidFill>
@@ -5322,8 +5322,27 @@
                 <a:ea typeface="Microsoft YaHei"/>
                 <a:cs typeface="Microsoft YaHei"/>
               </a:rPr>
-              <a:t>Flask 分析接口</a:t>
-            </a:r>
+              <a:t>Flask </a:t>
+            </a:r>
+            <a:r>
+              <a:rPr sz="1725" b="1" dirty="0" err="1">
+                <a:solidFill>
+                  <a:srgbClr val="172033"/>
+                </a:solidFill>
+                <a:latin typeface="Microsoft YaHei"/>
+                <a:ea typeface="Microsoft YaHei"/>
+                <a:cs typeface="Microsoft YaHei"/>
+              </a:rPr>
+              <a:t>接口</a:t>
+            </a:r>
+            <a:endParaRPr sz="1725" b="1" dirty="0">
+              <a:solidFill>
+                <a:srgbClr val="172033"/>
+              </a:solidFill>
+              <a:latin typeface="Microsoft YaHei"/>
+              <a:ea typeface="Microsoft YaHei"/>
+              <a:cs typeface="Microsoft YaHei"/>
+            </a:endParaRPr>
           </a:p>
         </p:txBody>
       </p:sp>
@@ -5371,16 +5390,24 @@
               </a:defRPr>
             </a:pPr>
             <a:r>
-              <a:rPr sz="1350" b="0">
-                <a:solidFill>
-                  <a:srgbClr val="667085"/>
-                </a:solidFill>
-                <a:latin typeface="Microsoft YaHei"/>
-                <a:ea typeface="Microsoft YaHei"/>
-                <a:cs typeface="Microsoft YaHei"/>
-              </a:rPr>
-              <a:t>只读聚合查询、对比分析、模型结果读取</a:t>
-            </a:r>
+              <a:rPr lang="zh-CN" altLang="en-US" sz="1350" b="0" dirty="0">
+                <a:solidFill>
+                  <a:srgbClr val="667085"/>
+                </a:solidFill>
+                <a:latin typeface="Microsoft YaHei"/>
+                <a:ea typeface="Microsoft YaHei"/>
+                <a:cs typeface="Microsoft YaHei"/>
+              </a:rPr>
+              <a:t>后端接口实现</a:t>
+            </a:r>
+            <a:endParaRPr sz="1350" b="0" dirty="0">
+              <a:solidFill>
+                <a:srgbClr val="667085"/>
+              </a:solidFill>
+              <a:latin typeface="Microsoft YaHei"/>
+              <a:ea typeface="Microsoft YaHei"/>
+              <a:cs typeface="Microsoft YaHei"/>
+            </a:endParaRPr>
           </a:p>
         </p:txBody>
       </p:sp>
